--- a/img/read-alignment.pptx
+++ b/img/read-alignment.pptx
@@ -3321,119 +3321,12 @@
           <a:chExt cx="0" cy="0"/>
         </a:xfrm>
       </p:grpSpPr>
-      <p:grpSp>
-        <p:nvGrpSpPr>
-          <p:cNvPr id="35" name="Group 34">
-            <a:extLst>
-              <a:ext uri="{FF2B5EF4-FFF2-40B4-BE49-F238E27FC236}">
-                <a16:creationId xmlns:a16="http://schemas.microsoft.com/office/drawing/2014/main" id="{69BBB78E-4548-2988-D75E-3958A4F742DC}"/>
-              </a:ext>
-            </a:extLst>
-          </p:cNvPr>
-          <p:cNvGrpSpPr/>
-          <p:nvPr/>
-        </p:nvGrpSpPr>
-        <p:grpSpPr>
-          <a:xfrm>
-            <a:off x="3970920" y="832173"/>
-            <a:ext cx="775892" cy="2938"/>
-            <a:chOff x="3970920" y="832173"/>
-            <a:chExt cx="775892" cy="2938"/>
-          </a:xfrm>
-        </p:grpSpPr>
-        <p:cxnSp>
-          <p:nvCxnSpPr>
-            <p:cNvPr id="5" name="Straight Connector 4">
-              <a:extLst>
-                <a:ext uri="{FF2B5EF4-FFF2-40B4-BE49-F238E27FC236}">
-                  <a16:creationId xmlns:a16="http://schemas.microsoft.com/office/drawing/2014/main" id="{6084378F-D1AD-4124-54BB-26A3098C933C}"/>
-                </a:ext>
-              </a:extLst>
-            </p:cNvPr>
-            <p:cNvCxnSpPr>
-              <a:cxnSpLocks/>
-            </p:cNvCxnSpPr>
-            <p:nvPr/>
-          </p:nvCxnSpPr>
-          <p:spPr>
-            <a:xfrm>
-              <a:off x="3970920" y="832173"/>
-              <a:ext cx="533845" cy="0"/>
-            </a:xfrm>
-            <a:prstGeom prst="line">
-              <a:avLst/>
-            </a:prstGeom>
-            <a:ln w="44450">
-              <a:solidFill>
-                <a:srgbClr val="00B0F0"/>
-              </a:solidFill>
-            </a:ln>
-          </p:spPr>
-          <p:style>
-            <a:lnRef idx="2">
-              <a:schemeClr val="accent1"/>
-            </a:lnRef>
-            <a:fillRef idx="0">
-              <a:schemeClr val="accent1"/>
-            </a:fillRef>
-            <a:effectRef idx="1">
-              <a:schemeClr val="accent1"/>
-            </a:effectRef>
-            <a:fontRef idx="minor">
-              <a:schemeClr val="tx1"/>
-            </a:fontRef>
-          </p:style>
-        </p:cxnSp>
-        <p:cxnSp>
-          <p:nvCxnSpPr>
-            <p:cNvPr id="7" name="Straight Connector 6">
-              <a:extLst>
-                <a:ext uri="{FF2B5EF4-FFF2-40B4-BE49-F238E27FC236}">
-                  <a16:creationId xmlns:a16="http://schemas.microsoft.com/office/drawing/2014/main" id="{6AB409D4-10EA-EAF2-7B82-9C25B3A50BE6}"/>
-                </a:ext>
-              </a:extLst>
-            </p:cNvPr>
-            <p:cNvCxnSpPr>
-              <a:cxnSpLocks/>
-            </p:cNvCxnSpPr>
-            <p:nvPr/>
-          </p:nvCxnSpPr>
-          <p:spPr>
-            <a:xfrm>
-              <a:off x="4504765" y="835111"/>
-              <a:ext cx="242047" cy="0"/>
-            </a:xfrm>
-            <a:prstGeom prst="line">
-              <a:avLst/>
-            </a:prstGeom>
-            <a:ln w="44450">
-              <a:solidFill>
-                <a:srgbClr val="FF0000"/>
-              </a:solidFill>
-            </a:ln>
-          </p:spPr>
-          <p:style>
-            <a:lnRef idx="2">
-              <a:schemeClr val="accent1"/>
-            </a:lnRef>
-            <a:fillRef idx="0">
-              <a:schemeClr val="accent1"/>
-            </a:fillRef>
-            <a:effectRef idx="1">
-              <a:schemeClr val="accent1"/>
-            </a:effectRef>
-            <a:fontRef idx="minor">
-              <a:schemeClr val="tx1"/>
-            </a:fontRef>
-          </p:style>
-        </p:cxnSp>
-      </p:grpSp>
       <p:cxnSp>
         <p:nvCxnSpPr>
-          <p:cNvPr id="9" name="Straight Connector 8">
-            <a:extLst>
-              <a:ext uri="{FF2B5EF4-FFF2-40B4-BE49-F238E27FC236}">
-                <a16:creationId xmlns:a16="http://schemas.microsoft.com/office/drawing/2014/main" id="{3518DDFC-1F62-A399-EA2D-06AA7A95A49A}"/>
+          <p:cNvPr id="5" name="Straight Connector 4">
+            <a:extLst>
+              <a:ext uri="{FF2B5EF4-FFF2-40B4-BE49-F238E27FC236}">
+                <a16:creationId xmlns:a16="http://schemas.microsoft.com/office/drawing/2014/main" id="{6084378F-D1AD-4124-54BB-26A3098C933C}"/>
               </a:ext>
             </a:extLst>
           </p:cNvPr>
@@ -3444,7 +3337,93 @@
         </p:nvCxnSpPr>
         <p:spPr>
           <a:xfrm>
-            <a:off x="3970920" y="1181475"/>
+            <a:off x="1470619" y="411191"/>
+            <a:ext cx="533845" cy="0"/>
+          </a:xfrm>
+          <a:prstGeom prst="line">
+            <a:avLst/>
+          </a:prstGeom>
+          <a:ln w="44450">
+            <a:solidFill>
+              <a:srgbClr val="00B0F0"/>
+            </a:solidFill>
+          </a:ln>
+        </p:spPr>
+        <p:style>
+          <a:lnRef idx="2">
+            <a:schemeClr val="accent1"/>
+          </a:lnRef>
+          <a:fillRef idx="0">
+            <a:schemeClr val="accent1"/>
+          </a:fillRef>
+          <a:effectRef idx="1">
+            <a:schemeClr val="accent1"/>
+          </a:effectRef>
+          <a:fontRef idx="minor">
+            <a:schemeClr val="tx1"/>
+          </a:fontRef>
+        </p:style>
+      </p:cxnSp>
+      <p:cxnSp>
+        <p:nvCxnSpPr>
+          <p:cNvPr id="7" name="Straight Connector 6">
+            <a:extLst>
+              <a:ext uri="{FF2B5EF4-FFF2-40B4-BE49-F238E27FC236}">
+                <a16:creationId xmlns:a16="http://schemas.microsoft.com/office/drawing/2014/main" id="{6AB409D4-10EA-EAF2-7B82-9C25B3A50BE6}"/>
+              </a:ext>
+            </a:extLst>
+          </p:cNvPr>
+          <p:cNvCxnSpPr>
+            <a:cxnSpLocks/>
+          </p:cNvCxnSpPr>
+          <p:nvPr/>
+        </p:nvCxnSpPr>
+        <p:spPr>
+          <a:xfrm>
+            <a:off x="2004464" y="411191"/>
+            <a:ext cx="242047" cy="0"/>
+          </a:xfrm>
+          <a:prstGeom prst="line">
+            <a:avLst/>
+          </a:prstGeom>
+          <a:ln w="44450">
+            <a:solidFill>
+              <a:srgbClr val="FF0000"/>
+            </a:solidFill>
+          </a:ln>
+        </p:spPr>
+        <p:style>
+          <a:lnRef idx="2">
+            <a:schemeClr val="accent1"/>
+          </a:lnRef>
+          <a:fillRef idx="0">
+            <a:schemeClr val="accent1"/>
+          </a:fillRef>
+          <a:effectRef idx="1">
+            <a:schemeClr val="accent1"/>
+          </a:effectRef>
+          <a:fontRef idx="minor">
+            <a:schemeClr val="tx1"/>
+          </a:fontRef>
+        </p:style>
+      </p:cxnSp>
+      <p:cxnSp>
+        <p:nvCxnSpPr>
+          <p:cNvPr id="9" name="Straight Connector 8">
+            <a:extLst>
+              <a:ext uri="{FF2B5EF4-FFF2-40B4-BE49-F238E27FC236}">
+                <a16:creationId xmlns:a16="http://schemas.microsoft.com/office/drawing/2014/main" id="{3518DDFC-1F62-A399-EA2D-06AA7A95A49A}"/>
+              </a:ext>
+            </a:extLst>
+          </p:cNvPr>
+          <p:cNvCxnSpPr>
+            <a:cxnSpLocks/>
+          </p:cNvCxnSpPr>
+          <p:nvPr/>
+        </p:nvCxnSpPr>
+        <p:spPr>
+          <a:xfrm>
+            <a:off x="1470619" y="767494"/>
             <a:ext cx="775892" cy="0"/>
           </a:xfrm>
           <a:prstGeom prst="line">
@@ -3487,7 +3466,7 @@
         </p:nvCxnSpPr>
         <p:spPr>
           <a:xfrm>
-            <a:off x="4727333" y="721337"/>
+            <a:off x="2227032" y="307356"/>
             <a:ext cx="775602" cy="0"/>
           </a:xfrm>
           <a:prstGeom prst="line">
@@ -3533,7 +3512,7 @@
         </p:nvCxnSpPr>
         <p:spPr>
           <a:xfrm>
-            <a:off x="1136072" y="4503628"/>
+            <a:off x="972999" y="3382751"/>
             <a:ext cx="6428509" cy="0"/>
           </a:xfrm>
           <a:prstGeom prst="line">
@@ -3579,7 +3558,7 @@
         </p:nvCxnSpPr>
         <p:spPr>
           <a:xfrm>
-            <a:off x="1616363" y="4503628"/>
+            <a:off x="1453290" y="3382751"/>
             <a:ext cx="2325236" cy="0"/>
           </a:xfrm>
           <a:prstGeom prst="line">
@@ -3622,7 +3601,7 @@
         </p:nvCxnSpPr>
         <p:spPr>
           <a:xfrm>
-            <a:off x="4467393" y="4503628"/>
+            <a:off x="4304320" y="3382751"/>
             <a:ext cx="2598425" cy="0"/>
           </a:xfrm>
           <a:prstGeom prst="line">
@@ -3668,7 +3647,7 @@
         </p:nvCxnSpPr>
         <p:spPr>
           <a:xfrm>
-            <a:off x="6096000" y="721337"/>
+            <a:off x="3595699" y="307356"/>
             <a:ext cx="775602" cy="0"/>
           </a:xfrm>
           <a:prstGeom prst="line">
@@ -3714,7 +3693,7 @@
         </p:nvCxnSpPr>
         <p:spPr>
           <a:xfrm>
-            <a:off x="5166060" y="555083"/>
+            <a:off x="2665759" y="141102"/>
             <a:ext cx="775602" cy="0"/>
           </a:xfrm>
           <a:prstGeom prst="line">
@@ -3760,7 +3739,7 @@
         </p:nvCxnSpPr>
         <p:spPr>
           <a:xfrm>
-            <a:off x="6118248" y="996747"/>
+            <a:off x="3617947" y="582766"/>
             <a:ext cx="775602" cy="0"/>
           </a:xfrm>
           <a:prstGeom prst="line">
@@ -3806,7 +3785,7 @@
         </p:nvCxnSpPr>
         <p:spPr>
           <a:xfrm>
-            <a:off x="5037720" y="997648"/>
+            <a:off x="1470909" y="972513"/>
             <a:ext cx="775602" cy="0"/>
           </a:xfrm>
           <a:prstGeom prst="line">
@@ -3852,7 +3831,7 @@
         </p:nvCxnSpPr>
         <p:spPr>
           <a:xfrm>
-            <a:off x="4802319" y="1363266"/>
+            <a:off x="2302018" y="949285"/>
             <a:ext cx="775602" cy="0"/>
           </a:xfrm>
           <a:prstGeom prst="line">
@@ -3898,7 +3877,7 @@
         </p:nvCxnSpPr>
         <p:spPr>
           <a:xfrm>
-            <a:off x="4611162" y="1598792"/>
+            <a:off x="2110861" y="1184811"/>
             <a:ext cx="775602" cy="0"/>
           </a:xfrm>
           <a:prstGeom prst="line">
@@ -3944,7 +3923,7 @@
         </p:nvCxnSpPr>
         <p:spPr>
           <a:xfrm>
-            <a:off x="5037720" y="1751192"/>
+            <a:off x="3906202" y="1248721"/>
             <a:ext cx="775602" cy="0"/>
           </a:xfrm>
           <a:prstGeom prst="line">
@@ -3976,10 +3955,10 @@
       </p:cxnSp>
       <p:cxnSp>
         <p:nvCxnSpPr>
-          <p:cNvPr id="33" name="Straight Connector 32">
-            <a:extLst>
-              <a:ext uri="{FF2B5EF4-FFF2-40B4-BE49-F238E27FC236}">
-                <a16:creationId xmlns:a16="http://schemas.microsoft.com/office/drawing/2014/main" id="{D87DF333-7E67-AB42-A267-7B8109BA18D9}"/>
+          <p:cNvPr id="34" name="Straight Connector 33">
+            <a:extLst>
+              <a:ext uri="{FF2B5EF4-FFF2-40B4-BE49-F238E27FC236}">
+                <a16:creationId xmlns:a16="http://schemas.microsoft.com/office/drawing/2014/main" id="{ABEF6B1D-C020-F8DF-FA71-028F4A49D007}"/>
               </a:ext>
             </a:extLst>
           </p:cNvPr>
@@ -3990,7 +3969,7 @@
         </p:nvCxnSpPr>
         <p:spPr>
           <a:xfrm>
-            <a:off x="5190120" y="1903592"/>
+            <a:off x="3230146" y="418192"/>
             <a:ext cx="775602" cy="0"/>
           </a:xfrm>
           <a:prstGeom prst="line">
@@ -4022,10 +4001,10 @@
       </p:cxnSp>
       <p:cxnSp>
         <p:nvCxnSpPr>
-          <p:cNvPr id="34" name="Straight Connector 33">
-            <a:extLst>
-              <a:ext uri="{FF2B5EF4-FFF2-40B4-BE49-F238E27FC236}">
-                <a16:creationId xmlns:a16="http://schemas.microsoft.com/office/drawing/2014/main" id="{ABEF6B1D-C020-F8DF-FA71-028F4A49D007}"/>
+          <p:cNvPr id="36" name="Straight Connector 35">
+            <a:extLst>
+              <a:ext uri="{FF2B5EF4-FFF2-40B4-BE49-F238E27FC236}">
+                <a16:creationId xmlns:a16="http://schemas.microsoft.com/office/drawing/2014/main" id="{B4BCA192-F358-720B-E266-52AA79EA3777}"/>
               </a:ext>
             </a:extLst>
           </p:cNvPr>
@@ -4036,7 +4015,308 @@
         </p:nvCxnSpPr>
         <p:spPr>
           <a:xfrm>
-            <a:off x="5730447" y="832173"/>
+            <a:off x="2537419" y="669781"/>
+            <a:ext cx="775602" cy="0"/>
+          </a:xfrm>
+          <a:prstGeom prst="line">
+            <a:avLst/>
+          </a:prstGeom>
+          <a:ln w="44450">
+            <a:solidFill>
+              <a:srgbClr val="00B0F0"/>
+            </a:solidFill>
+          </a:ln>
+        </p:spPr>
+        <p:style>
+          <a:lnRef idx="2">
+            <a:schemeClr val="accent1"/>
+          </a:lnRef>
+          <a:fillRef idx="0">
+            <a:schemeClr val="accent1"/>
+          </a:fillRef>
+          <a:effectRef idx="1">
+            <a:schemeClr val="accent1"/>
+          </a:effectRef>
+          <a:fontRef idx="minor">
+            <a:schemeClr val="tx1"/>
+          </a:fontRef>
+        </p:style>
+      </p:cxnSp>
+      <p:cxnSp>
+        <p:nvCxnSpPr>
+          <p:cNvPr id="38" name="Straight Connector 37">
+            <a:extLst>
+              <a:ext uri="{FF2B5EF4-FFF2-40B4-BE49-F238E27FC236}">
+                <a16:creationId xmlns:a16="http://schemas.microsoft.com/office/drawing/2014/main" id="{3085EA83-6515-6816-7A28-3B0B2F0917E6}"/>
+              </a:ext>
+            </a:extLst>
+          </p:cNvPr>
+          <p:cNvCxnSpPr>
+            <a:cxnSpLocks/>
+          </p:cNvCxnSpPr>
+          <p:nvPr/>
+        </p:nvCxnSpPr>
+        <p:spPr>
+          <a:xfrm>
+            <a:off x="2689819" y="816281"/>
+            <a:ext cx="775602" cy="0"/>
+          </a:xfrm>
+          <a:prstGeom prst="line">
+            <a:avLst/>
+          </a:prstGeom>
+          <a:ln w="44450">
+            <a:solidFill>
+              <a:srgbClr val="00B0F0"/>
+            </a:solidFill>
+          </a:ln>
+        </p:spPr>
+        <p:style>
+          <a:lnRef idx="2">
+            <a:schemeClr val="accent1"/>
+          </a:lnRef>
+          <a:fillRef idx="0">
+            <a:schemeClr val="accent1"/>
+          </a:fillRef>
+          <a:effectRef idx="1">
+            <a:schemeClr val="accent1"/>
+          </a:effectRef>
+          <a:fontRef idx="minor">
+            <a:schemeClr val="tx1"/>
+          </a:fontRef>
+        </p:style>
+      </p:cxnSp>
+      <p:cxnSp>
+        <p:nvCxnSpPr>
+          <p:cNvPr id="41" name="Straight Connector 40">
+            <a:extLst>
+              <a:ext uri="{FF2B5EF4-FFF2-40B4-BE49-F238E27FC236}">
+                <a16:creationId xmlns:a16="http://schemas.microsoft.com/office/drawing/2014/main" id="{814E795C-B40E-AD5D-6C57-A6B5FFEEC796}"/>
+              </a:ext>
+            </a:extLst>
+          </p:cNvPr>
+          <p:cNvCxnSpPr>
+            <a:cxnSpLocks/>
+          </p:cNvCxnSpPr>
+          <p:nvPr/>
+        </p:nvCxnSpPr>
+        <p:spPr>
+          <a:xfrm>
+            <a:off x="3733556" y="949285"/>
+            <a:ext cx="775602" cy="0"/>
+          </a:xfrm>
+          <a:prstGeom prst="line">
+            <a:avLst/>
+          </a:prstGeom>
+          <a:ln w="44450">
+            <a:solidFill>
+              <a:srgbClr val="00B0F0"/>
+            </a:solidFill>
+          </a:ln>
+        </p:spPr>
+        <p:style>
+          <a:lnRef idx="2">
+            <a:schemeClr val="accent1"/>
+          </a:lnRef>
+          <a:fillRef idx="0">
+            <a:schemeClr val="accent1"/>
+          </a:fillRef>
+          <a:effectRef idx="1">
+            <a:schemeClr val="accent1"/>
+          </a:effectRef>
+          <a:fontRef idx="minor">
+            <a:schemeClr val="tx1"/>
+          </a:fontRef>
+        </p:style>
+      </p:cxnSp>
+      <p:cxnSp>
+        <p:nvCxnSpPr>
+          <p:cNvPr id="42" name="Straight Connector 41">
+            <a:extLst>
+              <a:ext uri="{FF2B5EF4-FFF2-40B4-BE49-F238E27FC236}">
+                <a16:creationId xmlns:a16="http://schemas.microsoft.com/office/drawing/2014/main" id="{3522EC1F-CC3E-AFA2-38D5-3148027A1AF1}"/>
+              </a:ext>
+            </a:extLst>
+          </p:cNvPr>
+          <p:cNvCxnSpPr>
+            <a:cxnSpLocks/>
+          </p:cNvCxnSpPr>
+          <p:nvPr/>
+        </p:nvCxnSpPr>
+        <p:spPr>
+          <a:xfrm>
+            <a:off x="1616663" y="1360987"/>
+            <a:ext cx="775602" cy="0"/>
+          </a:xfrm>
+          <a:prstGeom prst="line">
+            <a:avLst/>
+          </a:prstGeom>
+          <a:ln w="44450">
+            <a:solidFill>
+              <a:srgbClr val="00B0F0"/>
+            </a:solidFill>
+          </a:ln>
+        </p:spPr>
+        <p:style>
+          <a:lnRef idx="2">
+            <a:schemeClr val="accent1"/>
+          </a:lnRef>
+          <a:fillRef idx="0">
+            <a:schemeClr val="accent1"/>
+          </a:fillRef>
+          <a:effectRef idx="1">
+            <a:schemeClr val="accent1"/>
+          </a:effectRef>
+          <a:fontRef idx="minor">
+            <a:schemeClr val="tx1"/>
+          </a:fontRef>
+        </p:style>
+      </p:cxnSp>
+      <p:cxnSp>
+        <p:nvCxnSpPr>
+          <p:cNvPr id="43" name="Straight Connector 42">
+            <a:extLst>
+              <a:ext uri="{FF2B5EF4-FFF2-40B4-BE49-F238E27FC236}">
+                <a16:creationId xmlns:a16="http://schemas.microsoft.com/office/drawing/2014/main" id="{29531DF3-31D1-76F6-2124-AD56D833916F}"/>
+              </a:ext>
+            </a:extLst>
+          </p:cNvPr>
+          <p:cNvCxnSpPr>
+            <a:cxnSpLocks/>
+          </p:cNvCxnSpPr>
+          <p:nvPr/>
+        </p:nvCxnSpPr>
+        <p:spPr>
+          <a:xfrm>
+            <a:off x="2767494" y="1360987"/>
+            <a:ext cx="775602" cy="0"/>
+          </a:xfrm>
+          <a:prstGeom prst="line">
+            <a:avLst/>
+          </a:prstGeom>
+          <a:ln w="44450">
+            <a:solidFill>
+              <a:srgbClr val="00B0F0"/>
+            </a:solidFill>
+          </a:ln>
+        </p:spPr>
+        <p:style>
+          <a:lnRef idx="2">
+            <a:schemeClr val="accent1"/>
+          </a:lnRef>
+          <a:fillRef idx="0">
+            <a:schemeClr val="accent1"/>
+          </a:fillRef>
+          <a:effectRef idx="1">
+            <a:schemeClr val="accent1"/>
+          </a:effectRef>
+          <a:fontRef idx="minor">
+            <a:schemeClr val="tx1"/>
+          </a:fontRef>
+        </p:style>
+      </p:cxnSp>
+      <p:cxnSp>
+        <p:nvCxnSpPr>
+          <p:cNvPr id="45" name="Straight Connector 44">
+            <a:extLst>
+              <a:ext uri="{FF2B5EF4-FFF2-40B4-BE49-F238E27FC236}">
+                <a16:creationId xmlns:a16="http://schemas.microsoft.com/office/drawing/2014/main" id="{5CF482ED-1E92-3FFE-49A8-BA042B0F3334}"/>
+              </a:ext>
+            </a:extLst>
+          </p:cNvPr>
+          <p:cNvCxnSpPr>
+            <a:cxnSpLocks/>
+          </p:cNvCxnSpPr>
+          <p:nvPr/>
+        </p:nvCxnSpPr>
+        <p:spPr>
+          <a:xfrm>
+            <a:off x="2498662" y="496732"/>
+            <a:ext cx="775602" cy="0"/>
+          </a:xfrm>
+          <a:prstGeom prst="line">
+            <a:avLst/>
+          </a:prstGeom>
+          <a:ln w="44450">
+            <a:solidFill>
+              <a:srgbClr val="00B0F0"/>
+            </a:solidFill>
+          </a:ln>
+        </p:spPr>
+        <p:style>
+          <a:lnRef idx="2">
+            <a:schemeClr val="accent1"/>
+          </a:lnRef>
+          <a:fillRef idx="0">
+            <a:schemeClr val="accent1"/>
+          </a:fillRef>
+          <a:effectRef idx="1">
+            <a:schemeClr val="accent1"/>
+          </a:effectRef>
+          <a:fontRef idx="minor">
+            <a:schemeClr val="tx1"/>
+          </a:fontRef>
+        </p:style>
+      </p:cxnSp>
+      <p:cxnSp>
+        <p:nvCxnSpPr>
+          <p:cNvPr id="46" name="Straight Connector 45">
+            <a:extLst>
+              <a:ext uri="{FF2B5EF4-FFF2-40B4-BE49-F238E27FC236}">
+                <a16:creationId xmlns:a16="http://schemas.microsoft.com/office/drawing/2014/main" id="{018CE822-927A-B7B9-FC8E-9826B1859B22}"/>
+              </a:ext>
+            </a:extLst>
+          </p:cNvPr>
+          <p:cNvCxnSpPr>
+            <a:cxnSpLocks/>
+          </p:cNvCxnSpPr>
+          <p:nvPr/>
+        </p:nvCxnSpPr>
+        <p:spPr>
+          <a:xfrm>
+            <a:off x="3847610" y="767494"/>
+            <a:ext cx="775602" cy="0"/>
+          </a:xfrm>
+          <a:prstGeom prst="line">
+            <a:avLst/>
+          </a:prstGeom>
+          <a:ln w="44450">
+            <a:solidFill>
+              <a:srgbClr val="00B0F0"/>
+            </a:solidFill>
+          </a:ln>
+        </p:spPr>
+        <p:style>
+          <a:lnRef idx="2">
+            <a:schemeClr val="accent1"/>
+          </a:lnRef>
+          <a:fillRef idx="0">
+            <a:schemeClr val="accent1"/>
+          </a:fillRef>
+          <a:effectRef idx="1">
+            <a:schemeClr val="accent1"/>
+          </a:effectRef>
+          <a:fontRef idx="minor">
+            <a:schemeClr val="tx1"/>
+          </a:fontRef>
+        </p:style>
+      </p:cxnSp>
+      <p:cxnSp>
+        <p:nvCxnSpPr>
+          <p:cNvPr id="47" name="Straight Connector 46">
+            <a:extLst>
+              <a:ext uri="{FF2B5EF4-FFF2-40B4-BE49-F238E27FC236}">
+                <a16:creationId xmlns:a16="http://schemas.microsoft.com/office/drawing/2014/main" id="{85DCBD6A-0102-272C-3EC2-29D14EBCAACA}"/>
+              </a:ext>
+            </a:extLst>
+          </p:cNvPr>
+          <p:cNvCxnSpPr>
+            <a:cxnSpLocks/>
+          </p:cNvCxnSpPr>
+          <p:nvPr/>
+        </p:nvCxnSpPr>
+        <p:spPr>
+          <a:xfrm>
+            <a:off x="2820097" y="1066289"/>
             <a:ext cx="775602" cy="0"/>
           </a:xfrm>
           <a:prstGeom prst="line">
@@ -4066,6 +4346,546 @@
           </a:fontRef>
         </p:style>
       </p:cxnSp>
+      <p:cxnSp>
+        <p:nvCxnSpPr>
+          <p:cNvPr id="48" name="Straight Connector 47">
+            <a:extLst>
+              <a:ext uri="{FF2B5EF4-FFF2-40B4-BE49-F238E27FC236}">
+                <a16:creationId xmlns:a16="http://schemas.microsoft.com/office/drawing/2014/main" id="{93F1599C-68C7-1C2B-70E0-14064DE32AC6}"/>
+              </a:ext>
+            </a:extLst>
+          </p:cNvPr>
+          <p:cNvCxnSpPr>
+            <a:cxnSpLocks/>
+          </p:cNvCxnSpPr>
+          <p:nvPr/>
+        </p:nvCxnSpPr>
+        <p:spPr>
+          <a:xfrm>
+            <a:off x="3770221" y="418192"/>
+            <a:ext cx="242047" cy="0"/>
+          </a:xfrm>
+          <a:prstGeom prst="line">
+            <a:avLst/>
+          </a:prstGeom>
+          <a:ln w="44450">
+            <a:solidFill>
+              <a:srgbClr val="FF0000"/>
+            </a:solidFill>
+          </a:ln>
+        </p:spPr>
+        <p:style>
+          <a:lnRef idx="2">
+            <a:schemeClr val="accent1"/>
+          </a:lnRef>
+          <a:fillRef idx="0">
+            <a:schemeClr val="accent1"/>
+          </a:fillRef>
+          <a:effectRef idx="1">
+            <a:schemeClr val="accent1"/>
+          </a:effectRef>
+          <a:fontRef idx="minor">
+            <a:schemeClr val="tx1"/>
+          </a:fontRef>
+        </p:style>
+      </p:cxnSp>
+      <p:cxnSp>
+        <p:nvCxnSpPr>
+          <p:cNvPr id="49" name="Straight Connector 48">
+            <a:extLst>
+              <a:ext uri="{FF2B5EF4-FFF2-40B4-BE49-F238E27FC236}">
+                <a16:creationId xmlns:a16="http://schemas.microsoft.com/office/drawing/2014/main" id="{BEAF8435-1D3F-64E4-CB8C-3A9BE239EBEC}"/>
+              </a:ext>
+            </a:extLst>
+          </p:cNvPr>
+          <p:cNvCxnSpPr>
+            <a:cxnSpLocks/>
+          </p:cNvCxnSpPr>
+          <p:nvPr/>
+        </p:nvCxnSpPr>
+        <p:spPr>
+          <a:xfrm>
+            <a:off x="4509158" y="1248721"/>
+            <a:ext cx="172646" cy="0"/>
+          </a:xfrm>
+          <a:prstGeom prst="line">
+            <a:avLst/>
+          </a:prstGeom>
+          <a:ln w="44450">
+            <a:solidFill>
+              <a:srgbClr val="FF0000"/>
+            </a:solidFill>
+          </a:ln>
+        </p:spPr>
+        <p:style>
+          <a:lnRef idx="2">
+            <a:schemeClr val="accent1"/>
+          </a:lnRef>
+          <a:fillRef idx="0">
+            <a:schemeClr val="accent1"/>
+          </a:fillRef>
+          <a:effectRef idx="1">
+            <a:schemeClr val="accent1"/>
+          </a:effectRef>
+          <a:fontRef idx="minor">
+            <a:schemeClr val="tx1"/>
+          </a:fontRef>
+        </p:style>
+      </p:cxnSp>
+      <p:cxnSp>
+        <p:nvCxnSpPr>
+          <p:cNvPr id="51" name="Straight Connector 50">
+            <a:extLst>
+              <a:ext uri="{FF2B5EF4-FFF2-40B4-BE49-F238E27FC236}">
+                <a16:creationId xmlns:a16="http://schemas.microsoft.com/office/drawing/2014/main" id="{ACA5B294-217E-3C76-2520-03711170EC33}"/>
+              </a:ext>
+            </a:extLst>
+          </p:cNvPr>
+          <p:cNvCxnSpPr>
+            <a:cxnSpLocks/>
+          </p:cNvCxnSpPr>
+          <p:nvPr/>
+        </p:nvCxnSpPr>
+        <p:spPr>
+          <a:xfrm>
+            <a:off x="3002634" y="1184811"/>
+            <a:ext cx="775892" cy="0"/>
+          </a:xfrm>
+          <a:prstGeom prst="line">
+            <a:avLst/>
+          </a:prstGeom>
+          <a:ln w="44450">
+            <a:solidFill>
+              <a:srgbClr val="FF0000"/>
+            </a:solidFill>
+          </a:ln>
+        </p:spPr>
+        <p:style>
+          <a:lnRef idx="2">
+            <a:schemeClr val="accent1"/>
+          </a:lnRef>
+          <a:fillRef idx="0">
+            <a:schemeClr val="accent1"/>
+          </a:fillRef>
+          <a:effectRef idx="1">
+            <a:schemeClr val="accent1"/>
+          </a:effectRef>
+          <a:fontRef idx="minor">
+            <a:schemeClr val="tx1"/>
+          </a:fontRef>
+        </p:style>
+      </p:cxnSp>
+      <p:cxnSp>
+        <p:nvCxnSpPr>
+          <p:cNvPr id="52" name="Straight Connector 51">
+            <a:extLst>
+              <a:ext uri="{FF2B5EF4-FFF2-40B4-BE49-F238E27FC236}">
+                <a16:creationId xmlns:a16="http://schemas.microsoft.com/office/drawing/2014/main" id="{562BD04D-D282-934A-906D-D89A0351C242}"/>
+              </a:ext>
+            </a:extLst>
+          </p:cNvPr>
+          <p:cNvCxnSpPr>
+            <a:cxnSpLocks/>
+          </p:cNvCxnSpPr>
+          <p:nvPr/>
+        </p:nvCxnSpPr>
+        <p:spPr>
+          <a:xfrm>
+            <a:off x="3292775" y="816281"/>
+            <a:ext cx="172646" cy="0"/>
+          </a:xfrm>
+          <a:prstGeom prst="line">
+            <a:avLst/>
+          </a:prstGeom>
+          <a:ln w="44450">
+            <a:solidFill>
+              <a:srgbClr val="FF0000"/>
+            </a:solidFill>
+          </a:ln>
+        </p:spPr>
+        <p:style>
+          <a:lnRef idx="2">
+            <a:schemeClr val="accent1"/>
+          </a:lnRef>
+          <a:fillRef idx="0">
+            <a:schemeClr val="accent1"/>
+          </a:fillRef>
+          <a:effectRef idx="1">
+            <a:schemeClr val="accent1"/>
+          </a:effectRef>
+          <a:fontRef idx="minor">
+            <a:schemeClr val="tx1"/>
+          </a:fontRef>
+        </p:style>
+      </p:cxnSp>
+      <p:cxnSp>
+        <p:nvCxnSpPr>
+          <p:cNvPr id="53" name="Straight Connector 52">
+            <a:extLst>
+              <a:ext uri="{FF2B5EF4-FFF2-40B4-BE49-F238E27FC236}">
+                <a16:creationId xmlns:a16="http://schemas.microsoft.com/office/drawing/2014/main" id="{D08103A0-7B54-5F05-8E3F-5545C1F65482}"/>
+              </a:ext>
+            </a:extLst>
+          </p:cNvPr>
+          <p:cNvCxnSpPr>
+            <a:cxnSpLocks/>
+          </p:cNvCxnSpPr>
+          <p:nvPr/>
+        </p:nvCxnSpPr>
+        <p:spPr>
+          <a:xfrm>
+            <a:off x="2004464" y="972513"/>
+            <a:ext cx="242047" cy="0"/>
+          </a:xfrm>
+          <a:prstGeom prst="line">
+            <a:avLst/>
+          </a:prstGeom>
+          <a:ln w="44450">
+            <a:solidFill>
+              <a:srgbClr val="FF0000"/>
+            </a:solidFill>
+          </a:ln>
+        </p:spPr>
+        <p:style>
+          <a:lnRef idx="2">
+            <a:schemeClr val="accent1"/>
+          </a:lnRef>
+          <a:fillRef idx="0">
+            <a:schemeClr val="accent1"/>
+          </a:fillRef>
+          <a:effectRef idx="1">
+            <a:schemeClr val="accent1"/>
+          </a:effectRef>
+          <a:fontRef idx="minor">
+            <a:schemeClr val="tx1"/>
+          </a:fontRef>
+        </p:style>
+      </p:cxnSp>
+      <p:cxnSp>
+        <p:nvCxnSpPr>
+          <p:cNvPr id="54" name="Straight Connector 53">
+            <a:extLst>
+              <a:ext uri="{FF2B5EF4-FFF2-40B4-BE49-F238E27FC236}">
+                <a16:creationId xmlns:a16="http://schemas.microsoft.com/office/drawing/2014/main" id="{2385C2F0-98AE-774E-EDDD-1DAA63297694}"/>
+              </a:ext>
+            </a:extLst>
+          </p:cNvPr>
+          <p:cNvCxnSpPr>
+            <a:cxnSpLocks/>
+          </p:cNvCxnSpPr>
+          <p:nvPr/>
+        </p:nvCxnSpPr>
+        <p:spPr>
+          <a:xfrm>
+            <a:off x="2150218" y="1360987"/>
+            <a:ext cx="242047" cy="0"/>
+          </a:xfrm>
+          <a:prstGeom prst="line">
+            <a:avLst/>
+          </a:prstGeom>
+          <a:ln w="44450">
+            <a:solidFill>
+              <a:srgbClr val="FF0000"/>
+            </a:solidFill>
+          </a:ln>
+        </p:spPr>
+        <p:style>
+          <a:lnRef idx="2">
+            <a:schemeClr val="accent1"/>
+          </a:lnRef>
+          <a:fillRef idx="0">
+            <a:schemeClr val="accent1"/>
+          </a:fillRef>
+          <a:effectRef idx="1">
+            <a:schemeClr val="accent1"/>
+          </a:effectRef>
+          <a:fontRef idx="minor">
+            <a:schemeClr val="tx1"/>
+          </a:fontRef>
+        </p:style>
+      </p:cxnSp>
+      <p:sp>
+        <p:nvSpPr>
+          <p:cNvPr id="55" name="TextBox 54">
+            <a:extLst>
+              <a:ext uri="{FF2B5EF4-FFF2-40B4-BE49-F238E27FC236}">
+                <a16:creationId xmlns:a16="http://schemas.microsoft.com/office/drawing/2014/main" id="{63D0DB6A-FD55-86DC-8C6F-15AEE7C00605}"/>
+              </a:ext>
+            </a:extLst>
+          </p:cNvPr>
+          <p:cNvSpPr txBox="1"/>
+          <p:nvPr/>
+        </p:nvSpPr>
+        <p:spPr>
+          <a:xfrm>
+            <a:off x="4875363" y="463377"/>
+            <a:ext cx="1669518" cy="369332"/>
+          </a:xfrm>
+          <a:prstGeom prst="rect">
+            <a:avLst/>
+          </a:prstGeom>
+          <a:noFill/>
+        </p:spPr>
+        <p:txBody>
+          <a:bodyPr wrap="square" rtlCol="0">
+            <a:spAutoFit/>
+          </a:bodyPr>
+          <a:lstStyle/>
+          <a:p>
+            <a:r>
+              <a:rPr lang="en-US" dirty="0"/>
+              <a:t>Raw reads</a:t>
+            </a:r>
+          </a:p>
+        </p:txBody>
+      </p:sp>
+      <p:cxnSp>
+        <p:nvCxnSpPr>
+          <p:cNvPr id="56" name="Straight Connector 55">
+            <a:extLst>
+              <a:ext uri="{FF2B5EF4-FFF2-40B4-BE49-F238E27FC236}">
+                <a16:creationId xmlns:a16="http://schemas.microsoft.com/office/drawing/2014/main" id="{EBE90216-63B8-47BE-B88C-C16988984E45}"/>
+              </a:ext>
+            </a:extLst>
+          </p:cNvPr>
+          <p:cNvCxnSpPr>
+            <a:cxnSpLocks/>
+          </p:cNvCxnSpPr>
+          <p:nvPr/>
+        </p:nvCxnSpPr>
+        <p:spPr>
+          <a:xfrm>
+            <a:off x="2039861" y="1108198"/>
+            <a:ext cx="242047" cy="0"/>
+          </a:xfrm>
+          <a:prstGeom prst="line">
+            <a:avLst/>
+          </a:prstGeom>
+          <a:ln w="44450">
+            <a:solidFill>
+              <a:srgbClr val="FF0000"/>
+            </a:solidFill>
+          </a:ln>
+        </p:spPr>
+        <p:style>
+          <a:lnRef idx="2">
+            <a:schemeClr val="accent1"/>
+          </a:lnRef>
+          <a:fillRef idx="0">
+            <a:schemeClr val="accent1"/>
+          </a:fillRef>
+          <a:effectRef idx="1">
+            <a:schemeClr val="accent1"/>
+          </a:effectRef>
+          <a:fontRef idx="minor">
+            <a:schemeClr val="tx1"/>
+          </a:fontRef>
+        </p:style>
+      </p:cxnSp>
+      <p:sp>
+        <p:nvSpPr>
+          <p:cNvPr id="57" name="TextBox 56">
+            <a:extLst>
+              <a:ext uri="{FF2B5EF4-FFF2-40B4-BE49-F238E27FC236}">
+                <a16:creationId xmlns:a16="http://schemas.microsoft.com/office/drawing/2014/main" id="{B350A620-1578-1A36-00E9-7C5F1442B268}"/>
+              </a:ext>
+            </a:extLst>
+          </p:cNvPr>
+          <p:cNvSpPr txBox="1"/>
+          <p:nvPr/>
+        </p:nvSpPr>
+        <p:spPr>
+          <a:xfrm>
+            <a:off x="4875363" y="2081564"/>
+            <a:ext cx="2324360" cy="369332"/>
+          </a:xfrm>
+          <a:prstGeom prst="rect">
+            <a:avLst/>
+          </a:prstGeom>
+          <a:noFill/>
+        </p:spPr>
+        <p:txBody>
+          <a:bodyPr wrap="square" rtlCol="0">
+            <a:spAutoFit/>
+          </a:bodyPr>
+          <a:lstStyle/>
+          <a:p>
+            <a:r>
+              <a:rPr lang="en-US" dirty="0"/>
+              <a:t>Processed reads</a:t>
+            </a:r>
+          </a:p>
+        </p:txBody>
+      </p:sp>
+      <p:sp>
+        <p:nvSpPr>
+          <p:cNvPr id="58" name="Down Arrow 57">
+            <a:extLst>
+              <a:ext uri="{FF2B5EF4-FFF2-40B4-BE49-F238E27FC236}">
+                <a16:creationId xmlns:a16="http://schemas.microsoft.com/office/drawing/2014/main" id="{E6379F22-FA7F-C765-2573-01F5636E381E}"/>
+              </a:ext>
+            </a:extLst>
+          </p:cNvPr>
+          <p:cNvSpPr/>
+          <p:nvPr/>
+        </p:nvSpPr>
+        <p:spPr>
+          <a:xfrm>
+            <a:off x="3167954" y="1516134"/>
+            <a:ext cx="145067" cy="365760"/>
+          </a:xfrm>
+          <a:prstGeom prst="downArrow">
+            <a:avLst/>
+          </a:prstGeom>
+        </p:spPr>
+        <p:style>
+          <a:lnRef idx="2">
+            <a:schemeClr val="accent1">
+              <a:shade val="15000"/>
+            </a:schemeClr>
+          </a:lnRef>
+          <a:fillRef idx="1">
+            <a:schemeClr val="accent1"/>
+          </a:fillRef>
+          <a:effectRef idx="0">
+            <a:schemeClr val="accent1"/>
+          </a:effectRef>
+          <a:fontRef idx="minor">
+            <a:schemeClr val="lt1"/>
+          </a:fontRef>
+        </p:style>
+        <p:txBody>
+          <a:bodyPr rtlCol="0" anchor="ctr"/>
+          <a:lstStyle/>
+          <a:p>
+            <a:pPr algn="ctr"/>
+            <a:endParaRPr lang="en-US"/>
+          </a:p>
+        </p:txBody>
+      </p:sp>
+      <p:sp>
+        <p:nvSpPr>
+          <p:cNvPr id="59" name="Down Arrow 58">
+            <a:extLst>
+              <a:ext uri="{FF2B5EF4-FFF2-40B4-BE49-F238E27FC236}">
+                <a16:creationId xmlns:a16="http://schemas.microsoft.com/office/drawing/2014/main" id="{265043FA-2AB9-7962-DF90-244A430CBF49}"/>
+              </a:ext>
+            </a:extLst>
+          </p:cNvPr>
+          <p:cNvSpPr/>
+          <p:nvPr/>
+        </p:nvSpPr>
+        <p:spPr>
+          <a:xfrm>
+            <a:off x="3167954" y="2827001"/>
+            <a:ext cx="145067" cy="365760"/>
+          </a:xfrm>
+          <a:prstGeom prst="downArrow">
+            <a:avLst/>
+          </a:prstGeom>
+        </p:spPr>
+        <p:style>
+          <a:lnRef idx="2">
+            <a:schemeClr val="accent1">
+              <a:shade val="15000"/>
+            </a:schemeClr>
+          </a:lnRef>
+          <a:fillRef idx="1">
+            <a:schemeClr val="accent1"/>
+          </a:fillRef>
+          <a:effectRef idx="0">
+            <a:schemeClr val="accent1"/>
+          </a:effectRef>
+          <a:fontRef idx="minor">
+            <a:schemeClr val="lt1"/>
+          </a:fontRef>
+        </p:style>
+        <p:txBody>
+          <a:bodyPr rtlCol="0" anchor="ctr"/>
+          <a:lstStyle/>
+          <a:p>
+            <a:pPr algn="ctr"/>
+            <a:endParaRPr lang="en-US"/>
+          </a:p>
+        </p:txBody>
+      </p:sp>
+      <p:sp>
+        <p:nvSpPr>
+          <p:cNvPr id="60" name="TextBox 59">
+            <a:extLst>
+              <a:ext uri="{FF2B5EF4-FFF2-40B4-BE49-F238E27FC236}">
+                <a16:creationId xmlns:a16="http://schemas.microsoft.com/office/drawing/2014/main" id="{3F45FD73-3DA7-0858-82B1-9A7483F0CF14}"/>
+              </a:ext>
+            </a:extLst>
+          </p:cNvPr>
+          <p:cNvSpPr txBox="1"/>
+          <p:nvPr/>
+        </p:nvSpPr>
+        <p:spPr>
+          <a:xfrm>
+            <a:off x="5919012" y="2854472"/>
+            <a:ext cx="2324360" cy="369332"/>
+          </a:xfrm>
+          <a:prstGeom prst="rect">
+            <a:avLst/>
+          </a:prstGeom>
+          <a:noFill/>
+        </p:spPr>
+        <p:txBody>
+          <a:bodyPr wrap="square" rtlCol="0">
+            <a:spAutoFit/>
+          </a:bodyPr>
+          <a:lstStyle/>
+          <a:p>
+            <a:r>
+              <a:rPr lang="en-US" dirty="0"/>
+              <a:t>Aligned reads</a:t>
+            </a:r>
+          </a:p>
+        </p:txBody>
+      </p:sp>
+      <p:sp>
+        <p:nvSpPr>
+          <p:cNvPr id="61" name="TextBox 60">
+            <a:extLst>
+              <a:ext uri="{FF2B5EF4-FFF2-40B4-BE49-F238E27FC236}">
+                <a16:creationId xmlns:a16="http://schemas.microsoft.com/office/drawing/2014/main" id="{8E7DFBFC-AA24-293E-3BFF-C388465B4934}"/>
+              </a:ext>
+            </a:extLst>
+          </p:cNvPr>
+          <p:cNvSpPr txBox="1"/>
+          <p:nvPr/>
+        </p:nvSpPr>
+        <p:spPr>
+          <a:xfrm>
+            <a:off x="4998713" y="3804268"/>
+            <a:ext cx="2324360" cy="923330"/>
+          </a:xfrm>
+          <a:prstGeom prst="rect">
+            <a:avLst/>
+          </a:prstGeom>
+          <a:noFill/>
+        </p:spPr>
+        <p:txBody>
+          <a:bodyPr wrap="square" rtlCol="0">
+            <a:spAutoFit/>
+          </a:bodyPr>
+          <a:lstStyle/>
+          <a:p>
+            <a:r>
+              <a:rPr lang="en-US" dirty="0"/>
+              <a:t>Gene counts</a:t>
+            </a:r>
+            <a:br>
+              <a:rPr lang="en-US" dirty="0"/>
+            </a:br>
+            <a:r>
+              <a:rPr lang="en-US" dirty="0"/>
+              <a:t>(across 2 or 3 samples)</a:t>
+            </a:r>
+          </a:p>
+        </p:txBody>
+      </p:sp>
     </p:spTree>
     <p:extLst>
       <p:ext uri="{BB962C8B-B14F-4D97-AF65-F5344CB8AC3E}">
